--- a/make_presentation/templates/templates/premium/no_logo_13.pptx
+++ b/make_presentation/templates/templates/premium/no_logo_13.pptx
@@ -307,7 +307,7 @@
             <a:pPr algn="r">
               <a:buNone/>
             </a:pPr>
-            <a:fld id="{6F982A12-5EA8-43B5-B069-0338419D4712}" type="slidenum">
+            <a:fld id="{CB2A88C3-B84B-4A55-8485-59052BE10873}" type="slidenum">
               <a:rPr b="0" lang="en-US" sz="1400" spc="-1" strike="noStrike">
                 <a:latin typeface="Times New Roman"/>
               </a:rPr>
@@ -344,7 +344,7 @@
       </p:grpSpPr>
       <p:sp>
         <p:nvSpPr>
-          <p:cNvPr id="191" name="PlaceHolder 1"/>
+          <p:cNvPr id="189" name="PlaceHolder 1"/>
           <p:cNvSpPr>
             <a:spLocks noGrp="1"/>
           </p:cNvSpPr>
@@ -367,7 +367,7 @@
       </p:sp>
       <p:sp>
         <p:nvSpPr>
-          <p:cNvPr id="192" name="PlaceHolder 2"/>
+          <p:cNvPr id="190" name="PlaceHolder 2"/>
           <p:cNvSpPr>
             <a:spLocks noGrp="1"/>
           </p:cNvSpPr>
@@ -401,7 +401,7 @@
       </p:sp>
       <p:sp>
         <p:nvSpPr>
-          <p:cNvPr id="193" name="PlaceHolder 3"/>
+          <p:cNvPr id="191" name="PlaceHolder 3"/>
           <p:cNvSpPr>
             <a:spLocks noGrp="1"/>
           </p:cNvSpPr>
@@ -448,7 +448,7 @@
               </a:lnSpc>
               <a:buNone/>
             </a:pPr>
-            <a:fld id="{325167AC-7121-4583-A69D-142FE9C24B17}" type="slidenum">
+            <a:fld id="{E9F13977-45B2-4936-AE56-13CA6C47EA1F}" type="slidenum">
               <a:rPr b="0" lang="en-US" sz="1800" spc="-1" strike="noStrike">
                 <a:solidFill>
                   <a:srgbClr val="000000"/>
@@ -488,7 +488,7 @@
       </p:grpSpPr>
       <p:sp>
         <p:nvSpPr>
-          <p:cNvPr id="218" name="PlaceHolder 1"/>
+          <p:cNvPr id="216" name="PlaceHolder 1"/>
           <p:cNvSpPr>
             <a:spLocks noGrp="1"/>
           </p:cNvSpPr>
@@ -511,7 +511,7 @@
       </p:sp>
       <p:sp>
         <p:nvSpPr>
-          <p:cNvPr id="219" name="PlaceHolder 2"/>
+          <p:cNvPr id="217" name="PlaceHolder 2"/>
           <p:cNvSpPr>
             <a:spLocks noGrp="1"/>
           </p:cNvSpPr>
@@ -545,7 +545,7 @@
       </p:sp>
       <p:sp>
         <p:nvSpPr>
-          <p:cNvPr id="220" name="PlaceHolder 3"/>
+          <p:cNvPr id="218" name="PlaceHolder 3"/>
           <p:cNvSpPr>
             <a:spLocks noGrp="1"/>
           </p:cNvSpPr>
@@ -592,7 +592,7 @@
               </a:lnSpc>
               <a:buNone/>
             </a:pPr>
-            <a:fld id="{3093C95D-BB65-4C49-9EA5-1A913C0450C5}" type="slidenum">
+            <a:fld id="{AE3296BF-A73B-47EB-B54A-BB4F31AEA460}" type="slidenum">
               <a:rPr b="0" lang="en-US" sz="1800" spc="-1" strike="noStrike">
                 <a:solidFill>
                   <a:srgbClr val="000000"/>
@@ -632,7 +632,7 @@
       </p:grpSpPr>
       <p:sp>
         <p:nvSpPr>
-          <p:cNvPr id="221" name="PlaceHolder 1"/>
+          <p:cNvPr id="219" name="PlaceHolder 1"/>
           <p:cNvSpPr>
             <a:spLocks noGrp="1"/>
           </p:cNvSpPr>
@@ -655,7 +655,7 @@
       </p:sp>
       <p:sp>
         <p:nvSpPr>
-          <p:cNvPr id="222" name="PlaceHolder 2"/>
+          <p:cNvPr id="220" name="PlaceHolder 2"/>
           <p:cNvSpPr>
             <a:spLocks noGrp="1"/>
           </p:cNvSpPr>
@@ -689,7 +689,7 @@
       </p:sp>
       <p:sp>
         <p:nvSpPr>
-          <p:cNvPr id="223" name="PlaceHolder 3"/>
+          <p:cNvPr id="221" name="PlaceHolder 3"/>
           <p:cNvSpPr>
             <a:spLocks noGrp="1"/>
           </p:cNvSpPr>
@@ -736,7 +736,7 @@
               </a:lnSpc>
               <a:buNone/>
             </a:pPr>
-            <a:fld id="{CA65B0C5-4891-4F26-95A0-6A15A9C28023}" type="slidenum">
+            <a:fld id="{3309AB26-C95B-4B0C-AE9E-3BFB3C3E5993}" type="slidenum">
               <a:rPr b="0" lang="en-US" sz="1800" spc="-1" strike="noStrike">
                 <a:solidFill>
                   <a:srgbClr val="000000"/>
@@ -776,7 +776,7 @@
       </p:grpSpPr>
       <p:sp>
         <p:nvSpPr>
-          <p:cNvPr id="224" name="PlaceHolder 1"/>
+          <p:cNvPr id="222" name="PlaceHolder 1"/>
           <p:cNvSpPr>
             <a:spLocks noGrp="1"/>
           </p:cNvSpPr>
@@ -799,7 +799,7 @@
       </p:sp>
       <p:sp>
         <p:nvSpPr>
-          <p:cNvPr id="225" name="PlaceHolder 2"/>
+          <p:cNvPr id="223" name="PlaceHolder 2"/>
           <p:cNvSpPr>
             <a:spLocks noGrp="1"/>
           </p:cNvSpPr>
@@ -833,7 +833,7 @@
       </p:sp>
       <p:sp>
         <p:nvSpPr>
-          <p:cNvPr id="226" name="PlaceHolder 3"/>
+          <p:cNvPr id="224" name="PlaceHolder 3"/>
           <p:cNvSpPr>
             <a:spLocks noGrp="1"/>
           </p:cNvSpPr>
@@ -880,7 +880,7 @@
               </a:lnSpc>
               <a:buNone/>
             </a:pPr>
-            <a:fld id="{F9F17F97-2808-44A7-87A6-79A3F7A01BEE}" type="slidenum">
+            <a:fld id="{7327C9B6-007A-4786-9CB1-FE95D55664C4}" type="slidenum">
               <a:rPr b="0" lang="en-US" sz="1800" spc="-1" strike="noStrike">
                 <a:solidFill>
                   <a:srgbClr val="000000"/>
@@ -920,7 +920,7 @@
       </p:grpSpPr>
       <p:sp>
         <p:nvSpPr>
-          <p:cNvPr id="227" name="PlaceHolder 1"/>
+          <p:cNvPr id="225" name="PlaceHolder 1"/>
           <p:cNvSpPr>
             <a:spLocks noGrp="1"/>
           </p:cNvSpPr>
@@ -943,7 +943,7 @@
       </p:sp>
       <p:sp>
         <p:nvSpPr>
-          <p:cNvPr id="228" name="PlaceHolder 2"/>
+          <p:cNvPr id="226" name="PlaceHolder 2"/>
           <p:cNvSpPr>
             <a:spLocks noGrp="1"/>
           </p:cNvSpPr>
@@ -977,7 +977,7 @@
       </p:sp>
       <p:sp>
         <p:nvSpPr>
-          <p:cNvPr id="229" name="PlaceHolder 3"/>
+          <p:cNvPr id="227" name="PlaceHolder 3"/>
           <p:cNvSpPr>
             <a:spLocks noGrp="1"/>
           </p:cNvSpPr>
@@ -1024,7 +1024,7 @@
               </a:lnSpc>
               <a:buNone/>
             </a:pPr>
-            <a:fld id="{900A94F2-F5A3-4809-BE20-2504D728ADBB}" type="slidenum">
+            <a:fld id="{688B3048-1E4C-44E6-8308-406BB45B27DF}" type="slidenum">
               <a:rPr b="0" lang="en-US" sz="1800" spc="-1" strike="noStrike">
                 <a:solidFill>
                   <a:srgbClr val="000000"/>
@@ -1064,7 +1064,7 @@
       </p:grpSpPr>
       <p:sp>
         <p:nvSpPr>
-          <p:cNvPr id="194" name="PlaceHolder 1"/>
+          <p:cNvPr id="192" name="PlaceHolder 1"/>
           <p:cNvSpPr>
             <a:spLocks noGrp="1"/>
           </p:cNvSpPr>
@@ -1087,7 +1087,7 @@
       </p:sp>
       <p:sp>
         <p:nvSpPr>
-          <p:cNvPr id="195" name="PlaceHolder 2"/>
+          <p:cNvPr id="193" name="PlaceHolder 2"/>
           <p:cNvSpPr>
             <a:spLocks noGrp="1"/>
           </p:cNvSpPr>
@@ -1121,7 +1121,7 @@
       </p:sp>
       <p:sp>
         <p:nvSpPr>
-          <p:cNvPr id="196" name="PlaceHolder 3"/>
+          <p:cNvPr id="194" name="PlaceHolder 3"/>
           <p:cNvSpPr>
             <a:spLocks noGrp="1"/>
           </p:cNvSpPr>
@@ -1168,7 +1168,7 @@
               </a:lnSpc>
               <a:buNone/>
             </a:pPr>
-            <a:fld id="{B19B901C-F50C-4095-804B-1783ACCEBAC5}" type="slidenum">
+            <a:fld id="{15A25165-2217-4F0F-8E41-8E38CFE1DC01}" type="slidenum">
               <a:rPr b="0" lang="en-US" sz="1800" spc="-1" strike="noStrike">
                 <a:solidFill>
                   <a:srgbClr val="000000"/>
@@ -1208,7 +1208,7 @@
       </p:grpSpPr>
       <p:sp>
         <p:nvSpPr>
-          <p:cNvPr id="197" name="PlaceHolder 1"/>
+          <p:cNvPr id="195" name="PlaceHolder 1"/>
           <p:cNvSpPr>
             <a:spLocks noGrp="1"/>
           </p:cNvSpPr>
@@ -1231,7 +1231,7 @@
       </p:sp>
       <p:sp>
         <p:nvSpPr>
-          <p:cNvPr id="198" name="PlaceHolder 2"/>
+          <p:cNvPr id="196" name="PlaceHolder 2"/>
           <p:cNvSpPr>
             <a:spLocks noGrp="1"/>
           </p:cNvSpPr>
@@ -1265,7 +1265,7 @@
       </p:sp>
       <p:sp>
         <p:nvSpPr>
-          <p:cNvPr id="199" name="PlaceHolder 3"/>
+          <p:cNvPr id="197" name="PlaceHolder 3"/>
           <p:cNvSpPr>
             <a:spLocks noGrp="1"/>
           </p:cNvSpPr>
@@ -1312,7 +1312,7 @@
               </a:lnSpc>
               <a:buNone/>
             </a:pPr>
-            <a:fld id="{B6B72979-A9EB-4707-B305-192ECCF212AD}" type="slidenum">
+            <a:fld id="{2169278D-51EF-4C1E-9717-4C628501512E}" type="slidenum">
               <a:rPr b="0" lang="en-US" sz="1800" spc="-1" strike="noStrike">
                 <a:solidFill>
                   <a:srgbClr val="000000"/>
@@ -1352,7 +1352,7 @@
       </p:grpSpPr>
       <p:sp>
         <p:nvSpPr>
-          <p:cNvPr id="200" name="PlaceHolder 1"/>
+          <p:cNvPr id="198" name="PlaceHolder 1"/>
           <p:cNvSpPr>
             <a:spLocks noGrp="1"/>
           </p:cNvSpPr>
@@ -1375,7 +1375,7 @@
       </p:sp>
       <p:sp>
         <p:nvSpPr>
-          <p:cNvPr id="201" name="PlaceHolder 2"/>
+          <p:cNvPr id="199" name="PlaceHolder 2"/>
           <p:cNvSpPr>
             <a:spLocks noGrp="1"/>
           </p:cNvSpPr>
@@ -1409,7 +1409,7 @@
       </p:sp>
       <p:sp>
         <p:nvSpPr>
-          <p:cNvPr id="202" name="PlaceHolder 3"/>
+          <p:cNvPr id="200" name="PlaceHolder 3"/>
           <p:cNvSpPr>
             <a:spLocks noGrp="1"/>
           </p:cNvSpPr>
@@ -1456,7 +1456,7 @@
               </a:lnSpc>
               <a:buNone/>
             </a:pPr>
-            <a:fld id="{F63C1C6B-802A-4F9A-96E9-DC262332ED26}" type="slidenum">
+            <a:fld id="{998201CA-61A4-413D-AAF8-69CEDD3774C7}" type="slidenum">
               <a:rPr b="0" lang="en-US" sz="1800" spc="-1" strike="noStrike">
                 <a:solidFill>
                   <a:srgbClr val="000000"/>
@@ -1496,7 +1496,7 @@
       </p:grpSpPr>
       <p:sp>
         <p:nvSpPr>
-          <p:cNvPr id="203" name="PlaceHolder 1"/>
+          <p:cNvPr id="201" name="PlaceHolder 1"/>
           <p:cNvSpPr>
             <a:spLocks noGrp="1"/>
           </p:cNvSpPr>
@@ -1519,7 +1519,7 @@
       </p:sp>
       <p:sp>
         <p:nvSpPr>
-          <p:cNvPr id="204" name="PlaceHolder 2"/>
+          <p:cNvPr id="202" name="PlaceHolder 2"/>
           <p:cNvSpPr>
             <a:spLocks noGrp="1"/>
           </p:cNvSpPr>
@@ -1553,7 +1553,7 @@
       </p:sp>
       <p:sp>
         <p:nvSpPr>
-          <p:cNvPr id="205" name="PlaceHolder 3"/>
+          <p:cNvPr id="203" name="PlaceHolder 3"/>
           <p:cNvSpPr>
             <a:spLocks noGrp="1"/>
           </p:cNvSpPr>
@@ -1600,7 +1600,7 @@
               </a:lnSpc>
               <a:buNone/>
             </a:pPr>
-            <a:fld id="{0827DB75-7F07-432F-B0E2-D43B9E857B4A}" type="slidenum">
+            <a:fld id="{91E4180F-8333-46EB-961E-432864FD0976}" type="slidenum">
               <a:rPr b="0" lang="en-US" sz="1800" spc="-1" strike="noStrike">
                 <a:solidFill>
                   <a:srgbClr val="000000"/>
@@ -1640,7 +1640,7 @@
       </p:grpSpPr>
       <p:sp>
         <p:nvSpPr>
-          <p:cNvPr id="206" name="PlaceHolder 1"/>
+          <p:cNvPr id="204" name="PlaceHolder 1"/>
           <p:cNvSpPr>
             <a:spLocks noGrp="1"/>
           </p:cNvSpPr>
@@ -1663,7 +1663,7 @@
       </p:sp>
       <p:sp>
         <p:nvSpPr>
-          <p:cNvPr id="207" name="PlaceHolder 2"/>
+          <p:cNvPr id="205" name="PlaceHolder 2"/>
           <p:cNvSpPr>
             <a:spLocks noGrp="1"/>
           </p:cNvSpPr>
@@ -1697,7 +1697,7 @@
       </p:sp>
       <p:sp>
         <p:nvSpPr>
-          <p:cNvPr id="208" name="PlaceHolder 3"/>
+          <p:cNvPr id="206" name="PlaceHolder 3"/>
           <p:cNvSpPr>
             <a:spLocks noGrp="1"/>
           </p:cNvSpPr>
@@ -1744,7 +1744,7 @@
               </a:lnSpc>
               <a:buNone/>
             </a:pPr>
-            <a:fld id="{D948A40E-94E2-4DC4-A870-A1BCFF1422CA}" type="slidenum">
+            <a:fld id="{3DC4EF94-C2EA-4D45-AE91-546A46E021C6}" type="slidenum">
               <a:rPr b="0" lang="en-US" sz="1800" spc="-1" strike="noStrike">
                 <a:solidFill>
                   <a:srgbClr val="000000"/>
@@ -1784,7 +1784,7 @@
       </p:grpSpPr>
       <p:sp>
         <p:nvSpPr>
-          <p:cNvPr id="209" name="PlaceHolder 1"/>
+          <p:cNvPr id="207" name="PlaceHolder 1"/>
           <p:cNvSpPr>
             <a:spLocks noGrp="1"/>
           </p:cNvSpPr>
@@ -1807,7 +1807,7 @@
       </p:sp>
       <p:sp>
         <p:nvSpPr>
-          <p:cNvPr id="210" name="PlaceHolder 2"/>
+          <p:cNvPr id="208" name="PlaceHolder 2"/>
           <p:cNvSpPr>
             <a:spLocks noGrp="1"/>
           </p:cNvSpPr>
@@ -1841,7 +1841,7 @@
       </p:sp>
       <p:sp>
         <p:nvSpPr>
-          <p:cNvPr id="211" name="PlaceHolder 3"/>
+          <p:cNvPr id="209" name="PlaceHolder 3"/>
           <p:cNvSpPr>
             <a:spLocks noGrp="1"/>
           </p:cNvSpPr>
@@ -1888,7 +1888,7 @@
               </a:lnSpc>
               <a:buNone/>
             </a:pPr>
-            <a:fld id="{A4902687-A668-4BAD-B4A7-69AD39A3DF19}" type="slidenum">
+            <a:fld id="{1083E901-22DD-4D8C-954A-8F60A262A37B}" type="slidenum">
               <a:rPr b="0" lang="en-US" sz="1800" spc="-1" strike="noStrike">
                 <a:solidFill>
                   <a:srgbClr val="000000"/>
@@ -1928,7 +1928,7 @@
       </p:grpSpPr>
       <p:sp>
         <p:nvSpPr>
-          <p:cNvPr id="212" name="PlaceHolder 1"/>
+          <p:cNvPr id="210" name="PlaceHolder 1"/>
           <p:cNvSpPr>
             <a:spLocks noGrp="1"/>
           </p:cNvSpPr>
@@ -1951,7 +1951,7 @@
       </p:sp>
       <p:sp>
         <p:nvSpPr>
-          <p:cNvPr id="213" name="PlaceHolder 2"/>
+          <p:cNvPr id="211" name="PlaceHolder 2"/>
           <p:cNvSpPr>
             <a:spLocks noGrp="1"/>
           </p:cNvSpPr>
@@ -1985,7 +1985,7 @@
       </p:sp>
       <p:sp>
         <p:nvSpPr>
-          <p:cNvPr id="214" name="PlaceHolder 3"/>
+          <p:cNvPr id="212" name="PlaceHolder 3"/>
           <p:cNvSpPr>
             <a:spLocks noGrp="1"/>
           </p:cNvSpPr>
@@ -2032,7 +2032,7 @@
               </a:lnSpc>
               <a:buNone/>
             </a:pPr>
-            <a:fld id="{0CBAB6A3-366D-4052-9981-870266A6A847}" type="slidenum">
+            <a:fld id="{E7812EB3-D15F-4494-B3EE-F80357DDFD1A}" type="slidenum">
               <a:rPr b="0" lang="en-US" sz="1800" spc="-1" strike="noStrike">
                 <a:solidFill>
                   <a:srgbClr val="000000"/>
@@ -2072,7 +2072,7 @@
       </p:grpSpPr>
       <p:sp>
         <p:nvSpPr>
-          <p:cNvPr id="215" name="PlaceHolder 1"/>
+          <p:cNvPr id="213" name="PlaceHolder 1"/>
           <p:cNvSpPr>
             <a:spLocks noGrp="1"/>
           </p:cNvSpPr>
@@ -2095,7 +2095,7 @@
       </p:sp>
       <p:sp>
         <p:nvSpPr>
-          <p:cNvPr id="216" name="PlaceHolder 2"/>
+          <p:cNvPr id="214" name="PlaceHolder 2"/>
           <p:cNvSpPr>
             <a:spLocks noGrp="1"/>
           </p:cNvSpPr>
@@ -2129,7 +2129,7 @@
       </p:sp>
       <p:sp>
         <p:nvSpPr>
-          <p:cNvPr id="217" name="PlaceHolder 3"/>
+          <p:cNvPr id="215" name="PlaceHolder 3"/>
           <p:cNvSpPr>
             <a:spLocks noGrp="1"/>
           </p:cNvSpPr>
@@ -2176,7 +2176,7 @@
               </a:lnSpc>
               <a:buNone/>
             </a:pPr>
-            <a:fld id="{402D701E-4B14-46CD-A36F-08027FF2C676}" type="slidenum">
+            <a:fld id="{23C19BD7-0149-4BF1-A84F-C51E6A1E9DDD}" type="slidenum">
               <a:rPr b="0" lang="en-US" sz="1800" spc="-1" strike="noStrike">
                 <a:solidFill>
                   <a:srgbClr val="000000"/>
@@ -4219,7 +4219,7 @@
         <p:spPr>
           <a:xfrm>
             <a:off x="457200" y="4027680"/>
-            <a:ext cx="10287000" cy="1915920"/>
+            <a:ext cx="10928880" cy="2030760"/>
           </a:xfrm>
           <a:prstGeom prst="rect">
             <a:avLst/>
@@ -4250,7 +4250,7 @@
               </a:tabLst>
             </a:pPr>
             <a:r>
-              <a:rPr b="1" lang="en-US" sz="4000" spc="-1" strike="noStrike">
+              <a:rPr b="1" lang="en-US" sz="4800" spc="-1" strike="noStrike">
                 <a:solidFill>
                   <a:srgbClr val="ffffff"/>
                 </a:solidFill>
@@ -4259,7 +4259,7 @@
               </a:rPr>
               <a:t>TITLE</a:t>
             </a:r>
-            <a:endParaRPr b="0" lang="en-US" sz="4000" spc="-1" strike="noStrike">
+            <a:endParaRPr b="0" lang="en-US" sz="4800" spc="-1" strike="noStrike">
               <a:latin typeface="Arial"/>
             </a:endParaRPr>
           </a:p>
@@ -4327,7 +4327,7 @@
       </p:grpSpPr>
       <p:sp>
         <p:nvSpPr>
-          <p:cNvPr id="150" name="PIC"/>
+          <p:cNvPr id="148" name="PIC"/>
           <p:cNvSpPr/>
           <p:nvPr/>
         </p:nvSpPr>
@@ -4383,7 +4383,7 @@
       </p:sp>
       <p:sp>
         <p:nvSpPr>
-          <p:cNvPr id="151" name="Линия_1"/>
+          <p:cNvPr id="149" name="Линия_1"/>
           <p:cNvSpPr/>
           <p:nvPr/>
         </p:nvSpPr>
@@ -4411,7 +4411,7 @@
       </p:sp>
       <p:sp>
         <p:nvSpPr>
-          <p:cNvPr id="152" name="SUBTITLE 2"/>
+          <p:cNvPr id="150" name="SUBTITLE 2"/>
           <p:cNvSpPr/>
           <p:nvPr/>
         </p:nvSpPr>
@@ -4466,7 +4466,7 @@
       </p:sp>
       <p:sp>
         <p:nvSpPr>
-          <p:cNvPr id="153" name="TEXT 2"/>
+          <p:cNvPr id="151" name="TEXT 2"/>
           <p:cNvSpPr/>
           <p:nvPr/>
         </p:nvSpPr>
@@ -4521,7 +4521,7 @@
       </p:sp>
       <p:pic>
         <p:nvPicPr>
-          <p:cNvPr id="154" name="Кнопка_Навигация_Фон" descr="/home/claude/vistas/assets/grad_circle.png"/>
+          <p:cNvPr id="152" name="Кнопка_Навигация_Фон" descr="/home/claude/vistas/assets/grad_circle.png"/>
           <p:cNvPicPr/>
           <p:nvPr/>
         </p:nvPicPr>
@@ -4544,7 +4544,7 @@
       </p:pic>
       <p:sp>
         <p:nvSpPr>
-          <p:cNvPr id="155" name="Кнопка_Навигация_Стрелка"/>
+          <p:cNvPr id="153" name="Кнопка_Навигация_Стрелка"/>
           <p:cNvSpPr/>
           <p:nvPr/>
         </p:nvSpPr>
@@ -4599,7 +4599,7 @@
       </p:sp>
       <p:sp>
         <p:nvSpPr>
-          <p:cNvPr id="156" name="TITLE"/>
+          <p:cNvPr id="154" name="TITLE"/>
           <p:cNvSpPr/>
           <p:nvPr/>
         </p:nvSpPr>
@@ -4654,7 +4654,7 @@
       </p:sp>
       <p:sp>
         <p:nvSpPr>
-          <p:cNvPr id="157" name="Иконка_1"/>
+          <p:cNvPr id="155" name="Иконка_1"/>
           <p:cNvSpPr/>
           <p:nvPr/>
         </p:nvSpPr>
@@ -4687,7 +4687,7 @@
       </p:sp>
       <p:pic>
         <p:nvPicPr>
-          <p:cNvPr id="158" name="Иконка_1_Акцент" descr="/home/claude/vistas/assets/grad_square.png"/>
+          <p:cNvPr id="156" name="Иконка_1_Акцент" descr="/home/claude/vistas/assets/grad_square.png"/>
           <p:cNvPicPr/>
           <p:nvPr/>
         </p:nvPicPr>
@@ -4710,7 +4710,7 @@
       </p:pic>
       <p:sp>
         <p:nvSpPr>
-          <p:cNvPr id="159" name="Линия_1"/>
+          <p:cNvPr id="157" name="Линия_1"/>
           <p:cNvSpPr/>
           <p:nvPr/>
         </p:nvSpPr>
@@ -4738,7 +4738,7 @@
       </p:sp>
       <p:sp>
         <p:nvSpPr>
-          <p:cNvPr id="160" name="SUBTITLE 2"/>
+          <p:cNvPr id="158" name="SUBTITLE 2"/>
           <p:cNvSpPr/>
           <p:nvPr/>
         </p:nvSpPr>
@@ -4793,7 +4793,7 @@
       </p:sp>
       <p:sp>
         <p:nvSpPr>
-          <p:cNvPr id="161" name="TEXT 2"/>
+          <p:cNvPr id="159" name="TEXT 2"/>
           <p:cNvSpPr/>
           <p:nvPr/>
         </p:nvSpPr>
@@ -4848,7 +4848,7 @@
       </p:sp>
       <p:sp>
         <p:nvSpPr>
-          <p:cNvPr id="162" name="Иконка_1"/>
+          <p:cNvPr id="160" name="Иконка_1"/>
           <p:cNvSpPr/>
           <p:nvPr/>
         </p:nvSpPr>
@@ -4881,7 +4881,7 @@
       </p:sp>
       <p:pic>
         <p:nvPicPr>
-          <p:cNvPr id="163" name="Иконка_1_Акцент" descr="/home/claude/vistas/assets/grad_square.png"/>
+          <p:cNvPr id="161" name="Иконка_1_Акцент" descr="/home/claude/vistas/assets/grad_square.png"/>
           <p:cNvPicPr/>
           <p:nvPr/>
         </p:nvPicPr>
@@ -4904,7 +4904,7 @@
       </p:pic>
       <p:sp>
         <p:nvSpPr>
-          <p:cNvPr id="164" name="Линия_1"/>
+          <p:cNvPr id="162" name="Линия_1"/>
           <p:cNvSpPr/>
           <p:nvPr/>
         </p:nvSpPr>
@@ -4932,7 +4932,7 @@
       </p:sp>
       <p:sp>
         <p:nvSpPr>
-          <p:cNvPr id="165" name="SUBTITLE 2"/>
+          <p:cNvPr id="163" name="SUBTITLE 2"/>
           <p:cNvSpPr/>
           <p:nvPr/>
         </p:nvSpPr>
@@ -4987,7 +4987,7 @@
       </p:sp>
       <p:sp>
         <p:nvSpPr>
-          <p:cNvPr id="166" name="TEXT 2"/>
+          <p:cNvPr id="164" name="TEXT 2"/>
           <p:cNvSpPr/>
           <p:nvPr/>
         </p:nvSpPr>
@@ -5042,7 +5042,7 @@
       </p:sp>
       <p:sp>
         <p:nvSpPr>
-          <p:cNvPr id="167" name="Иконка_1"/>
+          <p:cNvPr id="165" name="Иконка_1"/>
           <p:cNvSpPr/>
           <p:nvPr/>
         </p:nvSpPr>
@@ -5075,7 +5075,7 @@
       </p:sp>
       <p:pic>
         <p:nvPicPr>
-          <p:cNvPr id="168" name="Иконка_1_Акцент" descr="/home/claude/vistas/assets/grad_square.png"/>
+          <p:cNvPr id="166" name="Иконка_1_Акцент" descr="/home/claude/vistas/assets/grad_square.png"/>
           <p:cNvPicPr/>
           <p:nvPr/>
         </p:nvPicPr>
@@ -5135,7 +5135,7 @@
       </p:grpSpPr>
       <p:sp>
         <p:nvSpPr>
-          <p:cNvPr id="169" name="PIC"/>
+          <p:cNvPr id="167" name="PIC"/>
           <p:cNvSpPr/>
           <p:nvPr/>
         </p:nvSpPr>
@@ -5191,7 +5191,7 @@
       </p:sp>
       <p:sp>
         <p:nvSpPr>
-          <p:cNvPr id="170" name="TITLE"/>
+          <p:cNvPr id="168" name="TITLE"/>
           <p:cNvSpPr/>
           <p:nvPr/>
         </p:nvSpPr>
@@ -5246,7 +5246,7 @@
       </p:sp>
       <p:sp>
         <p:nvSpPr>
-          <p:cNvPr id="171" name="SUBTITLE 1"/>
+          <p:cNvPr id="169" name="SUBTITLE 1"/>
           <p:cNvSpPr/>
           <p:nvPr/>
         </p:nvSpPr>
@@ -5301,7 +5301,7 @@
       </p:sp>
       <p:sp>
         <p:nvSpPr>
-          <p:cNvPr id="172" name="TEXT 1"/>
+          <p:cNvPr id="170" name="TEXT 1"/>
           <p:cNvSpPr/>
           <p:nvPr/>
         </p:nvSpPr>
@@ -5376,7 +5376,7 @@
       </p:sp>
       <p:sp>
         <p:nvSpPr>
-          <p:cNvPr id="173" name="SUBTITLE 2"/>
+          <p:cNvPr id="171" name="SUBTITLE 2"/>
           <p:cNvSpPr/>
           <p:nvPr/>
         </p:nvSpPr>
@@ -5431,7 +5431,7 @@
       </p:sp>
       <p:sp>
         <p:nvSpPr>
-          <p:cNvPr id="174" name="TEXT 2"/>
+          <p:cNvPr id="172" name="TEXT 2"/>
           <p:cNvSpPr/>
           <p:nvPr/>
         </p:nvSpPr>
@@ -5486,7 +5486,7 @@
       </p:sp>
       <p:sp>
         <p:nvSpPr>
-          <p:cNvPr id="175" name="SUBTITLE 2"/>
+          <p:cNvPr id="173" name="SUBTITLE 2"/>
           <p:cNvSpPr/>
           <p:nvPr/>
         </p:nvSpPr>
@@ -5541,7 +5541,7 @@
       </p:sp>
       <p:sp>
         <p:nvSpPr>
-          <p:cNvPr id="176" name="TEXT 2"/>
+          <p:cNvPr id="174" name="TEXT 2"/>
           <p:cNvSpPr/>
           <p:nvPr/>
         </p:nvSpPr>
@@ -5633,7 +5633,7 @@
       </p:grpSpPr>
       <p:pic>
         <p:nvPicPr>
-          <p:cNvPr id="177" name="Кнопка_Навигация_Фон" descr="/home/claude/vistas/assets/grad_circle.png"/>
+          <p:cNvPr id="175" name="Кнопка_Навигация_Фон" descr="/home/claude/vistas/assets/grad_circle.png"/>
           <p:cNvPicPr/>
           <p:nvPr/>
         </p:nvPicPr>
@@ -5656,7 +5656,7 @@
       </p:pic>
       <p:sp>
         <p:nvSpPr>
-          <p:cNvPr id="178" name="Кнопка_Навигация_Стрелка"/>
+          <p:cNvPr id="176" name="Кнопка_Навигация_Стрелка"/>
           <p:cNvSpPr/>
           <p:nvPr/>
         </p:nvSpPr>
@@ -5711,7 +5711,7 @@
       </p:sp>
       <p:sp>
         <p:nvSpPr>
-          <p:cNvPr id="179" name="PIC 1"/>
+          <p:cNvPr id="177" name="PIC 1"/>
           <p:cNvSpPr/>
           <p:nvPr/>
         </p:nvSpPr>
@@ -5769,7 +5769,7 @@
       </p:sp>
       <p:sp>
         <p:nvSpPr>
-          <p:cNvPr id="180" name="SUBTITLE 1"/>
+          <p:cNvPr id="178" name="SUBTITLE 1"/>
           <p:cNvSpPr/>
           <p:nvPr/>
         </p:nvSpPr>
@@ -5824,7 +5824,7 @@
       </p:sp>
       <p:sp>
         <p:nvSpPr>
-          <p:cNvPr id="181" name="TEXT 1"/>
+          <p:cNvPr id="179" name="TEXT 1"/>
           <p:cNvSpPr/>
           <p:nvPr/>
         </p:nvSpPr>
@@ -5879,7 +5879,7 @@
       </p:sp>
       <p:sp>
         <p:nvSpPr>
-          <p:cNvPr id="182" name="PIC 2"/>
+          <p:cNvPr id="180" name="PIC 2"/>
           <p:cNvSpPr/>
           <p:nvPr/>
         </p:nvSpPr>
@@ -5937,7 +5937,7 @@
       </p:sp>
       <p:sp>
         <p:nvSpPr>
-          <p:cNvPr id="183" name="SUBTITLE 2"/>
+          <p:cNvPr id="181" name="SUBTITLE 2"/>
           <p:cNvSpPr/>
           <p:nvPr/>
         </p:nvSpPr>
@@ -5992,7 +5992,7 @@
       </p:sp>
       <p:sp>
         <p:nvSpPr>
-          <p:cNvPr id="184" name="TEXT 2"/>
+          <p:cNvPr id="182" name="TEXT 2"/>
           <p:cNvSpPr/>
           <p:nvPr/>
         </p:nvSpPr>
@@ -6047,7 +6047,7 @@
       </p:sp>
       <p:sp>
         <p:nvSpPr>
-          <p:cNvPr id="185" name="PIC 3"/>
+          <p:cNvPr id="183" name="PIC 3"/>
           <p:cNvSpPr/>
           <p:nvPr/>
         </p:nvSpPr>
@@ -6105,7 +6105,7 @@
       </p:sp>
       <p:sp>
         <p:nvSpPr>
-          <p:cNvPr id="186" name="SUBTITLE 3"/>
+          <p:cNvPr id="184" name="SUBTITLE 3"/>
           <p:cNvSpPr/>
           <p:nvPr/>
         </p:nvSpPr>
@@ -6160,7 +6160,7 @@
       </p:sp>
       <p:sp>
         <p:nvSpPr>
-          <p:cNvPr id="187" name="TEXT 3"/>
+          <p:cNvPr id="185" name="TEXT 3"/>
           <p:cNvSpPr/>
           <p:nvPr/>
         </p:nvSpPr>
@@ -6215,7 +6215,7 @@
       </p:sp>
       <p:sp>
         <p:nvSpPr>
-          <p:cNvPr id="188" name="TITLE"/>
+          <p:cNvPr id="186" name="TITLE"/>
           <p:cNvSpPr/>
           <p:nvPr/>
         </p:nvSpPr>
@@ -6307,7 +6307,7 @@
       </p:grpSpPr>
       <p:pic>
         <p:nvPicPr>
-          <p:cNvPr id="189" name="Градиент_Фон" descr="/home/claude/vistas/assets/grad_full_diagonal.png"/>
+          <p:cNvPr id="187" name="Градиент_Фон" descr="/home/claude/vistas/assets/grad_full_diagonal.png"/>
           <p:cNvPicPr/>
           <p:nvPr/>
         </p:nvPicPr>
@@ -6330,7 +6330,7 @@
       </p:pic>
       <p:sp>
         <p:nvSpPr>
-          <p:cNvPr id="190" name="TITLE"/>
+          <p:cNvPr id="188" name="TITLE"/>
           <p:cNvSpPr/>
           <p:nvPr/>
         </p:nvSpPr>
@@ -9611,67 +9611,14 @@
       </p:grpSpPr>
       <p:sp>
         <p:nvSpPr>
-          <p:cNvPr id="110" name="Затемнение"/>
-          <p:cNvSpPr/>
-          <p:nvPr/>
-        </p:nvSpPr>
-        <p:spPr>
-          <a:xfrm>
-            <a:off x="0" y="1328040"/>
-            <a:ext cx="12188520" cy="5529600"/>
-          </a:xfrm>
-          <a:prstGeom prst="rect">
-            <a:avLst/>
-          </a:prstGeom>
-          <a:solidFill>
-            <a:srgbClr val="d9d9d9"/>
-          </a:solidFill>
-          <a:ln w="0">
-            <a:noFill/>
-          </a:ln>
-        </p:spPr>
-        <p:style>
-          <a:lnRef idx="0"/>
-          <a:fillRef idx="0"/>
-          <a:effectRef idx="0"/>
-          <a:fontRef idx="minor"/>
-        </p:style>
-        <p:txBody>
-          <a:bodyPr lIns="90000" rIns="90000" tIns="45000" bIns="45000" anchor="ctr">
-            <a:noAutofit/>
-          </a:bodyPr>
-          <a:p>
-            <a:pPr algn="ctr">
-              <a:lnSpc>
-                <a:spcPct val="100000"/>
-              </a:lnSpc>
-              <a:buNone/>
-            </a:pPr>
-            <a:r>
-              <a:rPr b="0" lang="en-US" sz="1800" spc="-1" strike="noStrike">
-                <a:solidFill>
-                  <a:srgbClr val="ffffff"/>
-                </a:solidFill>
-                <a:latin typeface="Calibri"/>
-              </a:rPr>
-              <a:t>PIC</a:t>
-            </a:r>
-            <a:endParaRPr b="0" lang="en-US" sz="1800" spc="-1" strike="noStrike">
-              <a:latin typeface="Arial"/>
-            </a:endParaRPr>
-          </a:p>
-        </p:txBody>
-      </p:sp>
-      <p:sp>
-        <p:nvSpPr>
-          <p:cNvPr id="111" name="Чип_1"/>
-          <p:cNvSpPr/>
-          <p:nvPr/>
-        </p:nvSpPr>
-        <p:spPr>
-          <a:xfrm>
-            <a:off x="474480" y="5290560"/>
-            <a:ext cx="4673880" cy="1255680"/>
+          <p:cNvPr id="110" name="Чип_1"/>
+          <p:cNvSpPr/>
+          <p:nvPr/>
+        </p:nvSpPr>
+        <p:spPr>
+          <a:xfrm>
+            <a:off x="639360" y="5290560"/>
+            <a:ext cx="5315040" cy="1255680"/>
           </a:xfrm>
           <a:prstGeom prst="roundRect">
             <a:avLst>
@@ -9699,13 +9646,13 @@
       </p:sp>
       <p:sp>
         <p:nvSpPr>
-          <p:cNvPr id="112" name="SUBTITLE 2"/>
-          <p:cNvSpPr/>
-          <p:nvPr/>
-        </p:nvSpPr>
-        <p:spPr>
-          <a:xfrm>
-            <a:off x="639360" y="5413320"/>
+          <p:cNvPr id="111" name="SUBTITLE 2"/>
+          <p:cNvSpPr/>
+          <p:nvPr/>
+        </p:nvSpPr>
+        <p:spPr>
+          <a:xfrm>
+            <a:off x="803880" y="5413320"/>
             <a:ext cx="4345920" cy="465480"/>
           </a:xfrm>
           <a:prstGeom prst="rect">
@@ -9754,13 +9701,13 @@
       </p:sp>
       <p:sp>
         <p:nvSpPr>
-          <p:cNvPr id="113" name="TEXT 2"/>
-          <p:cNvSpPr/>
-          <p:nvPr/>
-        </p:nvSpPr>
-        <p:spPr>
-          <a:xfrm>
-            <a:off x="639360" y="5952240"/>
+          <p:cNvPr id="112" name="TEXT 2"/>
+          <p:cNvSpPr/>
+          <p:nvPr/>
+        </p:nvSpPr>
+        <p:spPr>
+          <a:xfrm>
+            <a:off x="803880" y="5952240"/>
             <a:ext cx="4345920" cy="502560"/>
           </a:xfrm>
           <a:prstGeom prst="rect">
@@ -9807,94 +9754,16 @@
           </a:p>
         </p:txBody>
       </p:sp>
-      <p:pic>
-        <p:nvPicPr>
-          <p:cNvPr id="114" name="Кнопка_Навигация_Фон" descr="/home/claude/vistas/assets/grad_circle.png"/>
-          <p:cNvPicPr/>
-          <p:nvPr/>
-        </p:nvPicPr>
-        <p:blipFill>
-          <a:blip r:embed="rId1"/>
-          <a:stretch/>
-        </p:blipFill>
-        <p:spPr>
-          <a:xfrm>
-            <a:off x="11228760" y="5897880"/>
-            <a:ext cx="502560" cy="502560"/>
-          </a:xfrm>
-          <a:prstGeom prst="rect">
-            <a:avLst/>
-          </a:prstGeom>
-          <a:ln w="0">
-            <a:noFill/>
-          </a:ln>
-        </p:spPr>
-      </p:pic>
-      <p:sp>
-        <p:nvSpPr>
-          <p:cNvPr id="115" name="Кнопка_Навигация_Стрелка"/>
-          <p:cNvSpPr/>
-          <p:nvPr/>
-        </p:nvSpPr>
-        <p:spPr>
-          <a:xfrm>
-            <a:off x="11228760" y="5897880"/>
-            <a:ext cx="502560" cy="502560"/>
-          </a:xfrm>
-          <a:prstGeom prst="rect">
-            <a:avLst/>
-          </a:prstGeom>
-          <a:noFill/>
-          <a:ln w="0">
-            <a:noFill/>
-          </a:ln>
-        </p:spPr>
-        <p:style>
-          <a:lnRef idx="0"/>
-          <a:fillRef idx="0"/>
-          <a:effectRef idx="0"/>
-          <a:fontRef idx="minor"/>
-        </p:style>
-        <p:txBody>
-          <a:bodyPr lIns="0" rIns="0" tIns="0" bIns="0" anchor="ctr">
-            <a:noAutofit/>
-          </a:bodyPr>
-          <a:p>
-            <a:pPr algn="ctr">
-              <a:lnSpc>
-                <a:spcPct val="100000"/>
-              </a:lnSpc>
-              <a:buNone/>
-              <a:tabLst>
-                <a:tab algn="l" pos="0"/>
-              </a:tabLst>
-            </a:pPr>
-            <a:r>
-              <a:rPr b="1" lang="en-US" sz="2000" spc="-1" strike="noStrike">
-                <a:solidFill>
-                  <a:srgbClr val="ffffff"/>
-                </a:solidFill>
-                <a:latin typeface="Arial"/>
-                <a:ea typeface="Arial"/>
-              </a:rPr>
-              <a:t>→</a:t>
-            </a:r>
-            <a:endParaRPr b="0" lang="en-US" sz="2000" spc="-1" strike="noStrike">
-              <a:latin typeface="Arial"/>
-            </a:endParaRPr>
-          </a:p>
-        </p:txBody>
-      </p:sp>
-      <p:sp>
-        <p:nvSpPr>
-          <p:cNvPr id="116" name="Чип_1"/>
-          <p:cNvSpPr/>
-          <p:nvPr/>
-        </p:nvSpPr>
-        <p:spPr>
-          <a:xfrm>
-            <a:off x="5677560" y="5290560"/>
-            <a:ext cx="4673880" cy="1255680"/>
+      <p:sp>
+        <p:nvSpPr>
+          <p:cNvPr id="113" name="Чип_1"/>
+          <p:cNvSpPr/>
+          <p:nvPr/>
+        </p:nvSpPr>
+        <p:spPr>
+          <a:xfrm>
+            <a:off x="6234480" y="5290560"/>
+            <a:ext cx="5313240" cy="1255680"/>
           </a:xfrm>
           <a:prstGeom prst="roundRect">
             <a:avLst>
@@ -9922,13 +9791,13 @@
       </p:sp>
       <p:sp>
         <p:nvSpPr>
-          <p:cNvPr id="117" name="SUBTITLE 2"/>
-          <p:cNvSpPr/>
-          <p:nvPr/>
-        </p:nvSpPr>
-        <p:spPr>
-          <a:xfrm>
-            <a:off x="5842080" y="5413320"/>
+          <p:cNvPr id="114" name="SUBTITLE 2"/>
+          <p:cNvSpPr/>
+          <p:nvPr/>
+        </p:nvSpPr>
+        <p:spPr>
+          <a:xfrm>
+            <a:off x="6399000" y="5413320"/>
             <a:ext cx="4345920" cy="465480"/>
           </a:xfrm>
           <a:prstGeom prst="rect">
@@ -9987,13 +9856,13 @@
       </p:sp>
       <p:sp>
         <p:nvSpPr>
-          <p:cNvPr id="118" name="TEXT 2"/>
-          <p:cNvSpPr/>
-          <p:nvPr/>
-        </p:nvSpPr>
-        <p:spPr>
-          <a:xfrm>
-            <a:off x="5842080" y="5952240"/>
+          <p:cNvPr id="115" name="TEXT 2"/>
+          <p:cNvSpPr/>
+          <p:nvPr/>
+        </p:nvSpPr>
+        <p:spPr>
+          <a:xfrm>
+            <a:off x="6399000" y="5952240"/>
             <a:ext cx="4345920" cy="502560"/>
           </a:xfrm>
           <a:prstGeom prst="rect">
@@ -10052,14 +9921,14 @@
       </p:sp>
       <p:sp>
         <p:nvSpPr>
-          <p:cNvPr id="119" name="Чип_1"/>
-          <p:cNvSpPr/>
-          <p:nvPr/>
-        </p:nvSpPr>
-        <p:spPr>
-          <a:xfrm>
-            <a:off x="474480" y="4143240"/>
-            <a:ext cx="9876960" cy="977040"/>
+          <p:cNvPr id="116" name="Чип_1"/>
+          <p:cNvSpPr/>
+          <p:nvPr/>
+        </p:nvSpPr>
+        <p:spPr>
+          <a:xfrm>
+            <a:off x="639360" y="4143240"/>
+            <a:ext cx="10908360" cy="977040"/>
           </a:xfrm>
           <a:prstGeom prst="roundRect">
             <a:avLst>
@@ -10087,13 +9956,13 @@
       </p:sp>
       <p:sp>
         <p:nvSpPr>
-          <p:cNvPr id="120" name="SUBTITLE 2"/>
-          <p:cNvSpPr/>
-          <p:nvPr/>
-        </p:nvSpPr>
-        <p:spPr>
-          <a:xfrm>
-            <a:off x="639360" y="4143240"/>
+          <p:cNvPr id="117" name="SUBTITLE 2"/>
+          <p:cNvSpPr/>
+          <p:nvPr/>
+        </p:nvSpPr>
+        <p:spPr>
+          <a:xfrm>
+            <a:off x="803880" y="4143240"/>
             <a:ext cx="9549000" cy="309600"/>
           </a:xfrm>
           <a:prstGeom prst="rect">
@@ -10152,13 +10021,13 @@
       </p:sp>
       <p:sp>
         <p:nvSpPr>
-          <p:cNvPr id="121" name="TEXT 2"/>
-          <p:cNvSpPr/>
-          <p:nvPr/>
-        </p:nvSpPr>
-        <p:spPr>
-          <a:xfrm>
-            <a:off x="639360" y="4526280"/>
+          <p:cNvPr id="118" name="TEXT 2"/>
+          <p:cNvSpPr/>
+          <p:nvPr/>
+        </p:nvSpPr>
+        <p:spPr>
+          <a:xfrm>
+            <a:off x="803880" y="4526280"/>
             <a:ext cx="9549000" cy="502560"/>
           </a:xfrm>
           <a:prstGeom prst="rect">
@@ -10217,7 +10086,7 @@
       </p:sp>
       <p:sp>
         <p:nvSpPr>
-          <p:cNvPr id="122" name="TITLE"/>
+          <p:cNvPr id="119" name="TITLE"/>
           <p:cNvSpPr/>
           <p:nvPr/>
         </p:nvSpPr>
@@ -10265,6 +10134,66 @@
               <a:t>TITLE</a:t>
             </a:r>
             <a:endParaRPr b="0" lang="en-US" sz="3200" spc="-1" strike="noStrike">
+              <a:latin typeface="Arial"/>
+            </a:endParaRPr>
+          </a:p>
+        </p:txBody>
+      </p:sp>
+      <p:sp>
+        <p:nvSpPr>
+          <p:cNvPr id="120" name="PIC 1"/>
+          <p:cNvSpPr/>
+          <p:nvPr/>
+        </p:nvSpPr>
+        <p:spPr>
+          <a:xfrm>
+            <a:off x="638280" y="1410840"/>
+            <a:ext cx="10908360" cy="2447640"/>
+          </a:xfrm>
+          <a:prstGeom prst="roundRect">
+            <a:avLst>
+              <a:gd name="adj" fmla="val 4706"/>
+            </a:avLst>
+          </a:prstGeom>
+          <a:solidFill>
+            <a:schemeClr val="bg1">
+              <a:lumMod val="85000"/>
+            </a:schemeClr>
+          </a:solidFill>
+          <a:ln w="9525">
+            <a:solidFill>
+              <a:srgbClr val="6e6e6e"/>
+            </a:solidFill>
+            <a:round/>
+          </a:ln>
+        </p:spPr>
+        <p:style>
+          <a:lnRef idx="0"/>
+          <a:fillRef idx="0"/>
+          <a:effectRef idx="0"/>
+          <a:fontRef idx="minor"/>
+        </p:style>
+        <p:txBody>
+          <a:bodyPr lIns="90000" rIns="90000" tIns="45000" bIns="45000" anchor="ctr">
+            <a:noAutofit/>
+          </a:bodyPr>
+          <a:p>
+            <a:pPr algn="ctr">
+              <a:lnSpc>
+                <a:spcPct val="100000"/>
+              </a:lnSpc>
+              <a:buNone/>
+            </a:pPr>
+            <a:r>
+              <a:rPr b="0" lang="en-US" sz="1800" spc="-1" strike="noStrike">
+                <a:solidFill>
+                  <a:srgbClr val="ffffff"/>
+                </a:solidFill>
+                <a:latin typeface="Calibri"/>
+              </a:rPr>
+              <a:t>PIC</a:t>
+            </a:r>
+            <a:endParaRPr b="0" lang="en-US" sz="1800" spc="-1" strike="noStrike">
               <a:latin typeface="Arial"/>
             </a:endParaRPr>
           </a:p>
@@ -10309,7 +10238,7 @@
       </p:grpSpPr>
       <p:sp>
         <p:nvSpPr>
-          <p:cNvPr id="123" name="Блок_3"/>
+          <p:cNvPr id="121" name="Блок_3"/>
           <p:cNvSpPr/>
           <p:nvPr/>
         </p:nvSpPr>
@@ -10342,7 +10271,7 @@
       </p:sp>
       <p:sp>
         <p:nvSpPr>
-          <p:cNvPr id="124" name="Блок_1"/>
+          <p:cNvPr id="122" name="Блок_1"/>
           <p:cNvSpPr/>
           <p:nvPr/>
         </p:nvSpPr>
@@ -10375,7 +10304,7 @@
       </p:sp>
       <p:pic>
         <p:nvPicPr>
-          <p:cNvPr id="125" name="Кнопка_Навигация_Фон" descr="/home/claude/vistas/assets/grad_circle.png"/>
+          <p:cNvPr id="123" name="Кнопка_Навигация_Фон" descr="/home/claude/vistas/assets/grad_circle.png"/>
           <p:cNvPicPr/>
           <p:nvPr/>
         </p:nvPicPr>
@@ -10398,7 +10327,7 @@
       </p:pic>
       <p:sp>
         <p:nvSpPr>
-          <p:cNvPr id="126" name="SUBTITLE 1"/>
+          <p:cNvPr id="124" name="SUBTITLE 1"/>
           <p:cNvSpPr/>
           <p:nvPr/>
         </p:nvSpPr>
@@ -10453,7 +10382,7 @@
       </p:sp>
       <p:sp>
         <p:nvSpPr>
-          <p:cNvPr id="127" name="TEXT 1"/>
+          <p:cNvPr id="125" name="TEXT 1"/>
           <p:cNvSpPr/>
           <p:nvPr/>
         </p:nvSpPr>
@@ -10508,7 +10437,7 @@
       </p:sp>
       <p:sp>
         <p:nvSpPr>
-          <p:cNvPr id="128" name="Блок_2"/>
+          <p:cNvPr id="126" name="Блок_2"/>
           <p:cNvSpPr/>
           <p:nvPr/>
         </p:nvSpPr>
@@ -10541,7 +10470,7 @@
       </p:sp>
       <p:sp>
         <p:nvSpPr>
-          <p:cNvPr id="129" name="SUBTITLE 2"/>
+          <p:cNvPr id="127" name="SUBTITLE 2"/>
           <p:cNvSpPr/>
           <p:nvPr/>
         </p:nvSpPr>
@@ -10596,7 +10525,7 @@
       </p:sp>
       <p:sp>
         <p:nvSpPr>
-          <p:cNvPr id="130" name="TEXT 2"/>
+          <p:cNvPr id="128" name="TEXT 2"/>
           <p:cNvSpPr/>
           <p:nvPr/>
         </p:nvSpPr>
@@ -10651,7 +10580,7 @@
       </p:sp>
       <p:sp>
         <p:nvSpPr>
-          <p:cNvPr id="131" name="SUBTITLE 3"/>
+          <p:cNvPr id="129" name="SUBTITLE 3"/>
           <p:cNvSpPr/>
           <p:nvPr/>
         </p:nvSpPr>
@@ -10706,7 +10635,7 @@
       </p:sp>
       <p:sp>
         <p:nvSpPr>
-          <p:cNvPr id="132" name="TEXT 3"/>
+          <p:cNvPr id="130" name="TEXT 3"/>
           <p:cNvSpPr/>
           <p:nvPr/>
         </p:nvSpPr>
@@ -10761,7 +10690,7 @@
       </p:sp>
       <p:sp>
         <p:nvSpPr>
-          <p:cNvPr id="133" name="TITLE"/>
+          <p:cNvPr id="131" name="TITLE"/>
           <p:cNvSpPr/>
           <p:nvPr/>
         </p:nvSpPr>
@@ -10816,7 +10745,7 @@
       </p:sp>
       <p:sp>
         <p:nvSpPr>
-          <p:cNvPr id="134" name="Кнопка_Навигация_Стрелка"/>
+          <p:cNvPr id="132" name="Кнопка_Навигация_Стрелка"/>
           <p:cNvSpPr/>
           <p:nvPr/>
         </p:nvSpPr>
@@ -10908,7 +10837,7 @@
       </p:grpSpPr>
       <p:sp>
         <p:nvSpPr>
-          <p:cNvPr id="135" name="Карточка_1"/>
+          <p:cNvPr id="133" name="Карточка_1"/>
           <p:cNvSpPr/>
           <p:nvPr/>
         </p:nvSpPr>
@@ -10941,7 +10870,7 @@
       </p:sp>
       <p:sp>
         <p:nvSpPr>
-          <p:cNvPr id="136" name="PIC 1"/>
+          <p:cNvPr id="134" name="PIC 1"/>
           <p:cNvSpPr/>
           <p:nvPr/>
         </p:nvSpPr>
@@ -10999,7 +10928,7 @@
       </p:sp>
       <p:sp>
         <p:nvSpPr>
-          <p:cNvPr id="137" name="SUBTITLE 1"/>
+          <p:cNvPr id="135" name="SUBTITLE 1"/>
           <p:cNvSpPr/>
           <p:nvPr/>
         </p:nvSpPr>
@@ -11054,7 +10983,7 @@
       </p:sp>
       <p:sp>
         <p:nvSpPr>
-          <p:cNvPr id="138" name="TEXT 1"/>
+          <p:cNvPr id="136" name="TEXT 1"/>
           <p:cNvSpPr/>
           <p:nvPr/>
         </p:nvSpPr>
@@ -11109,7 +11038,7 @@
       </p:sp>
       <p:sp>
         <p:nvSpPr>
-          <p:cNvPr id="139" name="Карточка_2"/>
+          <p:cNvPr id="137" name="Карточка_2"/>
           <p:cNvSpPr/>
           <p:nvPr/>
         </p:nvSpPr>
@@ -11142,7 +11071,7 @@
       </p:sp>
       <p:sp>
         <p:nvSpPr>
-          <p:cNvPr id="140" name="PIC 2"/>
+          <p:cNvPr id="138" name="PIC 2"/>
           <p:cNvSpPr/>
           <p:nvPr/>
         </p:nvSpPr>
@@ -11200,7 +11129,7 @@
       </p:sp>
       <p:sp>
         <p:nvSpPr>
-          <p:cNvPr id="141" name="SUBTITLE 2"/>
+          <p:cNvPr id="139" name="SUBTITLE 2"/>
           <p:cNvSpPr/>
           <p:nvPr/>
         </p:nvSpPr>
@@ -11255,7 +11184,7 @@
       </p:sp>
       <p:sp>
         <p:nvSpPr>
-          <p:cNvPr id="142" name="TEXT 2"/>
+          <p:cNvPr id="140" name="TEXT 2"/>
           <p:cNvSpPr/>
           <p:nvPr/>
         </p:nvSpPr>
@@ -11310,7 +11239,7 @@
       </p:sp>
       <p:sp>
         <p:nvSpPr>
-          <p:cNvPr id="143" name="Карточка_3"/>
+          <p:cNvPr id="141" name="Карточка_3"/>
           <p:cNvSpPr/>
           <p:nvPr/>
         </p:nvSpPr>
@@ -11343,7 +11272,7 @@
       </p:sp>
       <p:sp>
         <p:nvSpPr>
-          <p:cNvPr id="144" name="PIC 3"/>
+          <p:cNvPr id="142" name="PIC 3"/>
           <p:cNvSpPr/>
           <p:nvPr/>
         </p:nvSpPr>
@@ -11401,7 +11330,7 @@
       </p:sp>
       <p:sp>
         <p:nvSpPr>
-          <p:cNvPr id="145" name="SUBTITLE 3"/>
+          <p:cNvPr id="143" name="SUBTITLE 3"/>
           <p:cNvSpPr/>
           <p:nvPr/>
         </p:nvSpPr>
@@ -11456,7 +11385,7 @@
       </p:sp>
       <p:sp>
         <p:nvSpPr>
-          <p:cNvPr id="146" name="TEXT 3"/>
+          <p:cNvPr id="144" name="TEXT 3"/>
           <p:cNvSpPr/>
           <p:nvPr/>
         </p:nvSpPr>
@@ -11511,7 +11440,7 @@
       </p:sp>
       <p:sp>
         <p:nvSpPr>
-          <p:cNvPr id="147" name="TITLE"/>
+          <p:cNvPr id="145" name="TITLE"/>
           <p:cNvSpPr/>
           <p:nvPr/>
         </p:nvSpPr>
@@ -11566,7 +11495,7 @@
       </p:sp>
       <p:pic>
         <p:nvPicPr>
-          <p:cNvPr id="148" name="Кнопка_Навигация_Фон" descr="/home/claude/vistas/assets/grad_circle.png"/>
+          <p:cNvPr id="146" name="Кнопка_Навигация_Фон" descr="/home/claude/vistas/assets/grad_circle.png"/>
           <p:cNvPicPr/>
           <p:nvPr/>
         </p:nvPicPr>
@@ -11589,7 +11518,7 @@
       </p:pic>
       <p:sp>
         <p:nvSpPr>
-          <p:cNvPr id="149" name="Кнопка_Навигация_Стрелка"/>
+          <p:cNvPr id="147" name="Кнопка_Навигация_Стрелка"/>
           <p:cNvSpPr/>
           <p:nvPr/>
         </p:nvSpPr>
